--- a/learning-hour.pptx
+++ b/learning-hour.pptx
@@ -296,7 +296,7 @@
           <a:p>
             <a:fld id="{957D6DC5-306E-4ABC-9AC8-E2C0D65491EF}" type="datetimeFigureOut">
               <a:rPr lang="de-DE" smtClean="0"/>
-              <a:t>09.07.2025</a:t>
+              <a:t>10.10.2025</a:t>
             </a:fld>
             <a:endParaRPr lang="de-DE"/>
           </a:p>
@@ -473,7 +473,7 @@
           <a:p>
             <a:fld id="{2B052A35-9683-4BC0-AC46-092FDEE29B6E}" type="datetimeFigureOut">
               <a:rPr lang="de-DE" smtClean="0"/>
-              <a:t>09.07.2025</a:t>
+              <a:t>10.10.2025</a:t>
             </a:fld>
             <a:endParaRPr lang="de-DE"/>
           </a:p>
@@ -1539,7 +1539,7 @@
           <a:p>
             <a:fld id="{C54686FD-27CA-4264-A447-00CC3C9742ED}" type="datetime1">
               <a:rPr lang="de-DE" smtClean="0"/>
-              <a:t>09.07.2025</a:t>
+              <a:t>10.10.2025</a:t>
             </a:fld>
             <a:endParaRPr lang="de-DE" dirty="0"/>
           </a:p>
@@ -2291,7 +2291,7 @@
           <a:p>
             <a:fld id="{3D965A5E-C463-4E85-9592-0F17DD732390}" type="datetime1">
               <a:rPr lang="de-DE" smtClean="0"/>
-              <a:t>09.07.2025</a:t>
+              <a:t>10.10.2025</a:t>
             </a:fld>
             <a:endParaRPr lang="de-DE" dirty="0"/>
           </a:p>
@@ -2427,7 +2427,7 @@
           <a:p>
             <a:fld id="{EA33749F-693F-4A8B-AD1F-042F2F274E90}" type="datetime1">
               <a:rPr lang="de-DE" smtClean="0"/>
-              <a:t>09.07.2025</a:t>
+              <a:t>10.10.2025</a:t>
             </a:fld>
             <a:endParaRPr lang="de-DE" dirty="0"/>
           </a:p>
@@ -3131,7 +3131,7 @@
           <a:p>
             <a:fld id="{0610130C-7944-4BC2-9A97-BBE6081083DB}" type="datetime1">
               <a:rPr lang="de-DE" smtClean="0"/>
-              <a:t>09.07.2025</a:t>
+              <a:t>10.10.2025</a:t>
             </a:fld>
             <a:endParaRPr lang="de-DE" dirty="0"/>
           </a:p>
@@ -3426,7 +3426,7 @@
           <a:p>
             <a:fld id="{94FFB94A-3D39-4929-B688-1FEC69F38511}" type="datetime1">
               <a:rPr lang="de-DE" smtClean="0"/>
-              <a:t>09.07.2025</a:t>
+              <a:t>10.10.2025</a:t>
             </a:fld>
             <a:endParaRPr lang="de-DE" dirty="0"/>
           </a:p>
@@ -3874,7 +3874,7 @@
           <a:p>
             <a:fld id="{ABF0CCA0-3537-474F-AE4F-50DB31F53970}" type="datetime1">
               <a:rPr lang="de-DE" smtClean="0"/>
-              <a:t>09.07.2025</a:t>
+              <a:t>10.10.2025</a:t>
             </a:fld>
             <a:endParaRPr lang="de-DE" dirty="0"/>
           </a:p>
@@ -4276,7 +4276,7 @@
           <a:p>
             <a:fld id="{2196F416-5FE8-4978-BB70-45A780668996}" type="datetime1">
               <a:rPr lang="de-DE" smtClean="0"/>
-              <a:t>09.07.2025</a:t>
+              <a:t>10.10.2025</a:t>
             </a:fld>
             <a:endParaRPr lang="de-DE" dirty="0"/>
           </a:p>
@@ -4840,7 +4840,7 @@
           <a:p>
             <a:fld id="{897A5482-8DD3-4A2F-8052-E4D73B7FB815}" type="datetime1">
               <a:rPr lang="de-DE" smtClean="0"/>
-              <a:t>09.07.2025</a:t>
+              <a:t>10.10.2025</a:t>
             </a:fld>
             <a:endParaRPr lang="de-DE" dirty="0"/>
           </a:p>
@@ -5297,7 +5297,7 @@
           <a:p>
             <a:fld id="{2811867F-6609-430E-8E46-93FA078043F9}" type="datetime1">
               <a:rPr lang="de-DE" smtClean="0"/>
-              <a:t>09.07.2025</a:t>
+              <a:t>10.10.2025</a:t>
             </a:fld>
             <a:endParaRPr lang="de-DE" dirty="0"/>
           </a:p>
@@ -5834,7 +5834,7 @@
           <a:p>
             <a:fld id="{C816E7EE-D71F-4813-B3C4-79CC1FDB86FD}" type="datetime1">
               <a:rPr lang="de-DE" smtClean="0"/>
-              <a:t>09.07.2025</a:t>
+              <a:t>10.10.2025</a:t>
             </a:fld>
             <a:endParaRPr lang="de-DE" dirty="0"/>
           </a:p>
@@ -6679,7 +6679,7 @@
           <a:p>
             <a:fld id="{1E5347CC-51E0-4888-A1E2-77457BC79666}" type="datetime1">
               <a:rPr lang="de-DE" smtClean="0"/>
-              <a:t>09.07.2025</a:t>
+              <a:t>10.10.2025</a:t>
             </a:fld>
             <a:endParaRPr lang="de-DE" dirty="0"/>
           </a:p>
@@ -7169,7 +7169,7 @@
           <a:p>
             <a:fld id="{CB735FD0-6D1F-4C20-8240-E620B4515DA4}" type="datetime1">
               <a:rPr lang="de-DE" smtClean="0"/>
-              <a:t>09.07.2025</a:t>
+              <a:t>10.10.2025</a:t>
             </a:fld>
             <a:endParaRPr lang="de-DE" dirty="0"/>
           </a:p>
@@ -7817,7 +7817,7 @@
           <a:p>
             <a:fld id="{B8A3C1FD-6FBC-40B2-88F5-F3E61E8EEBF0}" type="datetime1">
               <a:rPr lang="de-DE" smtClean="0"/>
-              <a:t>09.07.2025</a:t>
+              <a:t>10.10.2025</a:t>
             </a:fld>
             <a:endParaRPr lang="de-DE" dirty="0"/>
           </a:p>
@@ -7878,7 +7878,7 @@
           <a:p>
             <a:fld id="{20A47483-8978-4DD3-AF31-01D1F5325BE2}" type="datetime1">
               <a:rPr lang="de-DE" smtClean="0"/>
-              <a:t>09.07.2025</a:t>
+              <a:t>10.10.2025</a:t>
             </a:fld>
             <a:endParaRPr lang="de-DE" dirty="0"/>
           </a:p>
@@ -8652,7 +8652,7 @@
           <a:p>
             <a:fld id="{AF1CC51D-1C22-4CF3-8FD3-18250F190113}" type="datetime1">
               <a:rPr lang="de-DE" smtClean="0"/>
-              <a:t>09.07.2025</a:t>
+              <a:t>10.10.2025</a:t>
             </a:fld>
             <a:endParaRPr lang="de-DE" dirty="0"/>
           </a:p>
@@ -9151,7 +9151,7 @@
           <a:p>
             <a:fld id="{843C3ECC-28BA-4648-A791-48E762D6A652}" type="datetime1">
               <a:rPr lang="de-DE" smtClean="0"/>
-              <a:t>09.07.2025</a:t>
+              <a:t>10.10.2025</a:t>
             </a:fld>
             <a:endParaRPr lang="de-DE" dirty="0"/>
           </a:p>
@@ -9996,7 +9996,7 @@
           <a:p>
             <a:fld id="{D4078B34-1100-4057-AC85-2D835B7BBC46}" type="datetime1">
               <a:rPr lang="de-DE" smtClean="0"/>
-              <a:t>09.07.2025</a:t>
+              <a:t>10.10.2025</a:t>
             </a:fld>
             <a:endParaRPr lang="de-DE" dirty="0"/>
           </a:p>
@@ -10557,7 +10557,7 @@
           <a:p>
             <a:fld id="{62E99009-138A-4843-A2F8-8E923EF61B41}" type="datetime1">
               <a:rPr lang="de-DE" smtClean="0"/>
-              <a:t>09.07.2025</a:t>
+              <a:t>10.10.2025</a:t>
             </a:fld>
             <a:endParaRPr lang="de-DE" dirty="0"/>
           </a:p>
@@ -10744,7 +10744,7 @@
           <a:p>
             <a:fld id="{BAB53D6C-4676-4A04-907A-7B3E00E1C1AD}" type="datetime1">
               <a:rPr lang="de-DE" smtClean="0"/>
-              <a:t>09.07.2025</a:t>
+              <a:t>10.10.2025</a:t>
             </a:fld>
             <a:endParaRPr lang="de-DE" dirty="0"/>
           </a:p>
@@ -11568,7 +11568,7 @@
           <a:p>
             <a:fld id="{0B8A382A-7EAA-4F63-8582-9328F93E5971}" type="datetime1">
               <a:rPr lang="de-DE" smtClean="0"/>
-              <a:t>09.07.2025</a:t>
+              <a:t>10.10.2025</a:t>
             </a:fld>
             <a:endParaRPr lang="de-DE" dirty="0"/>
           </a:p>
@@ -11986,7 +11986,7 @@
           <a:p>
             <a:fld id="{0C9F6CE3-EA10-4BD8-B1B5-D51137E37B62}" type="datetime1">
               <a:rPr lang="de-DE" smtClean="0"/>
-              <a:t>09.07.2025</a:t>
+              <a:t>10.10.2025</a:t>
             </a:fld>
             <a:endParaRPr lang="de-DE" dirty="0"/>
           </a:p>
@@ -12263,7 +12263,7 @@
           <a:p>
             <a:fld id="{0B3ED860-F659-4DA4-A4D1-650787465D35}" type="datetime1">
               <a:rPr lang="de-DE" smtClean="0"/>
-              <a:t>09.07.2025</a:t>
+              <a:t>10.10.2025</a:t>
             </a:fld>
             <a:endParaRPr lang="de-DE" dirty="0"/>
           </a:p>
@@ -13082,7 +13082,7 @@
           <a:p>
             <a:fld id="{AF1CC51D-1C22-4CF3-8FD3-18250F190113}" type="datetime1">
               <a:rPr lang="de-DE" smtClean="0"/>
-              <a:t>09.07.2025</a:t>
+              <a:t>10.10.2025</a:t>
             </a:fld>
             <a:endParaRPr lang="de-DE" dirty="0"/>
           </a:p>
@@ -13354,7 +13354,7 @@
                   </a:schemeClr>
                 </a:solidFill>
               </a:rPr>
-              <a:t> Code </a:t>
+              <a:t> </a:t>
             </a:r>
             <a:r>
               <a:rPr lang="de-DE" sz="2399" dirty="0" err="1">
@@ -13364,7 +13364,7 @@
                   </a:schemeClr>
                 </a:solidFill>
               </a:rPr>
-              <a:t>from</a:t>
+              <a:t>inherited</a:t>
             </a:r>
             <a:r>
               <a:rPr lang="de-DE" sz="2399" dirty="0">
@@ -13374,7 +13374,27 @@
                   </a:schemeClr>
                 </a:solidFill>
               </a:rPr>
-              <a:t> MBS</a:t>
+              <a:t> Code </a:t>
+            </a:r>
+            <a:r>
+              <a:rPr lang="de-DE" sz="2399" dirty="0" err="1">
+                <a:solidFill>
+                  <a:schemeClr val="tx1">
+                    <a:lumMod val="50000"/>
+                  </a:schemeClr>
+                </a:solidFill>
+              </a:rPr>
+              <a:t>from</a:t>
+            </a:r>
+            <a:r>
+              <a:rPr lang="de-DE" sz="2399" dirty="0">
+                <a:solidFill>
+                  <a:schemeClr val="tx1">
+                    <a:lumMod val="50000"/>
+                  </a:schemeClr>
+                </a:solidFill>
+              </a:rPr>
+              <a:t> Raiffeisen</a:t>
             </a:r>
           </a:p>
           <a:p>
@@ -14056,7 +14076,7 @@
         <p:spPr>
           <a:xfrm>
             <a:off x="2423592" y="3212976"/>
-            <a:ext cx="6965368" cy="1077218"/>
+            <a:ext cx="8005718" cy="1077218"/>
           </a:xfrm>
           <a:prstGeom prst="rect">
             <a:avLst/>
@@ -14073,10 +14093,22 @@
               <a:t>Class: </a:t>
             </a:r>
             <a:r>
-              <a:rPr lang="de-DE" sz="3200" dirty="0" err="1"/>
-              <a:t>MeteringPointService</a:t>
-            </a:r>
-            <a:endParaRPr lang="de-DE" sz="3200" dirty="0"/>
+              <a:rPr lang="de-DE" altLang="de-DE" sz="3200" dirty="0" err="1">
+                <a:solidFill>
+                  <a:srgbClr val="00627A"/>
+                </a:solidFill>
+                <a:latin typeface="JetBrains Mono" panose="02000009000000000000" pitchFamily="49" charset="0"/>
+                <a:cs typeface="JetBrains Mono" panose="02000009000000000000" pitchFamily="49" charset="0"/>
+              </a:rPr>
+              <a:t>ExchangeRateAccess</a:t>
+            </a:r>
+            <a:endParaRPr lang="de-DE" sz="3200" dirty="0">
+              <a:solidFill>
+                <a:srgbClr val="00627A"/>
+              </a:solidFill>
+              <a:latin typeface="JetBrains Mono" panose="02000009000000000000" pitchFamily="49" charset="0"/>
+              <a:cs typeface="JetBrains Mono" panose="02000009000000000000" pitchFamily="49" charset="0"/>
+            </a:endParaRPr>
           </a:p>
           <a:p>
             <a:r>
@@ -14084,10 +14116,242 @@
               <a:t>Method: </a:t>
             </a:r>
             <a:r>
-              <a:rPr lang="de-DE" sz="3200" dirty="0" err="1"/>
-              <a:t>getNewestPointOfDeliveries</a:t>
+              <a:rPr lang="de-DE" altLang="de-DE" sz="3200" dirty="0" err="1">
+                <a:solidFill>
+                  <a:srgbClr val="00627A"/>
+                </a:solidFill>
+                <a:latin typeface="JetBrains Mono" panose="02000009000000000000" pitchFamily="49" charset="0"/>
+                <a:cs typeface="JetBrains Mono" panose="02000009000000000000" pitchFamily="49" charset="0"/>
+              </a:rPr>
+              <a:t>getExchangeRateNormalMode</a:t>
             </a:r>
             <a:endParaRPr lang="de-DE" sz="3200" dirty="0"/>
+          </a:p>
+        </p:txBody>
+      </p:sp>
+      <p:sp>
+        <p:nvSpPr>
+          <p:cNvPr id="5" name="Inhaltsplatzhalter 2">
+            <a:extLst>
+              <a:ext uri="{FF2B5EF4-FFF2-40B4-BE49-F238E27FC236}">
+                <a16:creationId xmlns:a16="http://schemas.microsoft.com/office/drawing/2014/main" id="{39D72E43-6A5A-5833-3891-B6EA823D82B3}"/>
+              </a:ext>
+            </a:extLst>
+          </p:cNvPr>
+          <p:cNvSpPr txBox="1">
+            <a:spLocks/>
+          </p:cNvSpPr>
+          <p:nvPr/>
+        </p:nvSpPr>
+        <p:spPr>
+          <a:xfrm>
+            <a:off x="4439816" y="4869160"/>
+            <a:ext cx="2736888" cy="432047"/>
+          </a:xfrm>
+          <a:prstGeom prst="rect">
+            <a:avLst/>
+          </a:prstGeom>
+        </p:spPr>
+        <p:txBody>
+          <a:bodyPr vert="horz" lIns="91404" tIns="45702" rIns="91404" bIns="45702" rtlCol="0">
+            <a:normAutofit fontScale="92500"/>
+          </a:bodyPr>
+          <a:lstStyle>
+            <a:lvl1pPr marL="342900" indent="-342900" algn="l" defTabSz="457200" rtl="0" eaLnBrk="1" latinLnBrk="0" hangingPunct="1">
+              <a:spcBef>
+                <a:spcPts val="600"/>
+              </a:spcBef>
+              <a:buClr>
+                <a:schemeClr val="accent1"/>
+              </a:buClr>
+              <a:buFont typeface="Wingdings" panose="05000000000000000000" pitchFamily="2" charset="2"/>
+              <a:buChar char="§"/>
+              <a:defRPr sz="2400" kern="1200">
+                <a:solidFill>
+                  <a:schemeClr val="tx1"/>
+                </a:solidFill>
+                <a:latin typeface="Open Sans Light" panose="020B0306030504020204" pitchFamily="34" charset="0"/>
+                <a:ea typeface="Open Sans Light" panose="020B0306030504020204" pitchFamily="34" charset="0"/>
+                <a:cs typeface="Open Sans Light" panose="020B0306030504020204" pitchFamily="34" charset="0"/>
+              </a:defRPr>
+            </a:lvl1pPr>
+            <a:lvl2pPr marL="742950" indent="-285750" algn="l" defTabSz="457200" rtl="0" eaLnBrk="1" latinLnBrk="0" hangingPunct="1">
+              <a:spcBef>
+                <a:spcPts val="600"/>
+              </a:spcBef>
+              <a:buClr>
+                <a:schemeClr val="accent1"/>
+              </a:buClr>
+              <a:buFont typeface="Wingdings" panose="05000000000000000000" pitchFamily="2" charset="2"/>
+              <a:buChar char="§"/>
+              <a:defRPr sz="2000" kern="1200">
+                <a:solidFill>
+                  <a:schemeClr val="tx1"/>
+                </a:solidFill>
+                <a:latin typeface="Open Sans Light" panose="020B0306030504020204" pitchFamily="34" charset="0"/>
+                <a:ea typeface="Open Sans Light" panose="020B0306030504020204" pitchFamily="34" charset="0"/>
+                <a:cs typeface="Open Sans Light" panose="020B0306030504020204" pitchFamily="34" charset="0"/>
+              </a:defRPr>
+            </a:lvl2pPr>
+            <a:lvl3pPr marL="1143000" indent="-228600" algn="l" defTabSz="457200" rtl="0" eaLnBrk="1" latinLnBrk="0" hangingPunct="1">
+              <a:spcBef>
+                <a:spcPts val="600"/>
+              </a:spcBef>
+              <a:buClr>
+                <a:schemeClr val="accent1"/>
+              </a:buClr>
+              <a:buFont typeface="Wingdings" panose="05000000000000000000" pitchFamily="2" charset="2"/>
+              <a:buChar char="§"/>
+              <a:defRPr sz="1600" kern="1200">
+                <a:solidFill>
+                  <a:schemeClr val="tx1"/>
+                </a:solidFill>
+                <a:latin typeface="Open Sans Light" panose="020B0306030504020204" pitchFamily="34" charset="0"/>
+                <a:ea typeface="Open Sans Light" panose="020B0306030504020204" pitchFamily="34" charset="0"/>
+                <a:cs typeface="Open Sans Light" panose="020B0306030504020204" pitchFamily="34" charset="0"/>
+              </a:defRPr>
+            </a:lvl3pPr>
+            <a:lvl4pPr marL="1600200" indent="-228600" algn="l" defTabSz="457200" rtl="0" eaLnBrk="1" latinLnBrk="0" hangingPunct="1">
+              <a:spcBef>
+                <a:spcPts val="600"/>
+              </a:spcBef>
+              <a:buClr>
+                <a:schemeClr val="accent1"/>
+              </a:buClr>
+              <a:buFont typeface="Symbol" panose="05050102010706020507" pitchFamily="18" charset="2"/>
+              <a:buChar char="-"/>
+              <a:defRPr sz="1600" kern="1200">
+                <a:solidFill>
+                  <a:schemeClr val="tx1"/>
+                </a:solidFill>
+                <a:latin typeface="Open Sans Light" panose="020B0306030504020204" pitchFamily="34" charset="0"/>
+                <a:ea typeface="Open Sans Light" panose="020B0306030504020204" pitchFamily="34" charset="0"/>
+                <a:cs typeface="Open Sans Light" panose="020B0306030504020204" pitchFamily="34" charset="0"/>
+              </a:defRPr>
+            </a:lvl4pPr>
+            <a:lvl5pPr marL="2057400" indent="-228600" algn="l" defTabSz="457200" rtl="0" eaLnBrk="1" latinLnBrk="0" hangingPunct="1">
+              <a:spcBef>
+                <a:spcPts val="600"/>
+              </a:spcBef>
+              <a:buClr>
+                <a:schemeClr val="accent1"/>
+              </a:buClr>
+              <a:buFont typeface="Symbol" panose="05050102010706020507" pitchFamily="18" charset="2"/>
+              <a:buChar char="-"/>
+              <a:defRPr sz="1200" kern="1200">
+                <a:solidFill>
+                  <a:schemeClr val="tx1"/>
+                </a:solidFill>
+                <a:latin typeface="Open Sans Light" panose="020B0306030504020204" pitchFamily="34" charset="0"/>
+                <a:ea typeface="Open Sans Light" panose="020B0306030504020204" pitchFamily="34" charset="0"/>
+                <a:cs typeface="Open Sans Light" panose="020B0306030504020204" pitchFamily="34" charset="0"/>
+              </a:defRPr>
+            </a:lvl5pPr>
+            <a:lvl6pPr marL="2514600" indent="-228600" algn="l" defTabSz="457200" rtl="0" eaLnBrk="1" latinLnBrk="0" hangingPunct="1">
+              <a:spcBef>
+                <a:spcPct val="20000"/>
+              </a:spcBef>
+              <a:buFont typeface="Arial"/>
+              <a:buChar char="•"/>
+              <a:defRPr sz="2000" kern="1200">
+                <a:solidFill>
+                  <a:schemeClr val="tx1"/>
+                </a:solidFill>
+                <a:latin typeface="+mn-lt"/>
+                <a:ea typeface="+mn-ea"/>
+                <a:cs typeface="+mn-cs"/>
+              </a:defRPr>
+            </a:lvl6pPr>
+            <a:lvl7pPr marL="2971800" indent="-228600" algn="l" defTabSz="457200" rtl="0" eaLnBrk="1" latinLnBrk="0" hangingPunct="1">
+              <a:spcBef>
+                <a:spcPct val="20000"/>
+              </a:spcBef>
+              <a:buFont typeface="Arial"/>
+              <a:buChar char="•"/>
+              <a:defRPr sz="2000" kern="1200">
+                <a:solidFill>
+                  <a:schemeClr val="tx1"/>
+                </a:solidFill>
+                <a:latin typeface="+mn-lt"/>
+                <a:ea typeface="+mn-ea"/>
+                <a:cs typeface="+mn-cs"/>
+              </a:defRPr>
+            </a:lvl7pPr>
+            <a:lvl8pPr marL="3429000" indent="-228600" algn="l" defTabSz="457200" rtl="0" eaLnBrk="1" latinLnBrk="0" hangingPunct="1">
+              <a:spcBef>
+                <a:spcPct val="20000"/>
+              </a:spcBef>
+              <a:buFont typeface="Arial"/>
+              <a:buChar char="•"/>
+              <a:defRPr sz="2000" kern="1200">
+                <a:solidFill>
+                  <a:schemeClr val="tx1"/>
+                </a:solidFill>
+                <a:latin typeface="+mn-lt"/>
+                <a:ea typeface="+mn-ea"/>
+                <a:cs typeface="+mn-cs"/>
+              </a:defRPr>
+            </a:lvl8pPr>
+            <a:lvl9pPr marL="3886200" indent="-228600" algn="l" defTabSz="457200" rtl="0" eaLnBrk="1" latinLnBrk="0" hangingPunct="1">
+              <a:spcBef>
+                <a:spcPct val="20000"/>
+              </a:spcBef>
+              <a:buFont typeface="Arial"/>
+              <a:buChar char="•"/>
+              <a:defRPr sz="2000" kern="1200">
+                <a:solidFill>
+                  <a:schemeClr val="tx1"/>
+                </a:solidFill>
+                <a:latin typeface="+mn-lt"/>
+                <a:ea typeface="+mn-ea"/>
+                <a:cs typeface="+mn-cs"/>
+              </a:defRPr>
+            </a:lvl9pPr>
+          </a:lstStyle>
+          <a:p>
+            <a:pPr marL="0" indent="0">
+              <a:buNone/>
+            </a:pPr>
+            <a:r>
+              <a:rPr lang="de-DE" sz="2399" i="1" dirty="0" err="1">
+                <a:solidFill>
+                  <a:schemeClr val="tx1">
+                    <a:lumMod val="50000"/>
+                  </a:schemeClr>
+                </a:solidFill>
+              </a:rPr>
+              <a:t>size</a:t>
+            </a:r>
+            <a:r>
+              <a:rPr lang="de-DE" sz="2399" i="1" dirty="0">
+                <a:solidFill>
+                  <a:schemeClr val="tx1">
+                    <a:lumMod val="50000"/>
+                  </a:schemeClr>
+                </a:solidFill>
+              </a:rPr>
+              <a:t> </a:t>
+            </a:r>
+            <a:r>
+              <a:rPr lang="de-DE" sz="2399" i="1" dirty="0" err="1">
+                <a:solidFill>
+                  <a:schemeClr val="tx1">
+                    <a:lumMod val="50000"/>
+                  </a:schemeClr>
+                </a:solidFill>
+              </a:rPr>
+              <a:t>doesn‘t</a:t>
+            </a:r>
+            <a:r>
+              <a:rPr lang="de-DE" sz="2399" i="1" dirty="0">
+                <a:solidFill>
+                  <a:schemeClr val="tx1">
+                    <a:lumMod val="50000"/>
+                  </a:schemeClr>
+                </a:solidFill>
+              </a:rPr>
+              <a:t> matter ;-)</a:t>
+            </a:r>
           </a:p>
         </p:txBody>
       </p:sp>
@@ -17180,18 +17444,18 @@
 <file path=customXml/itemProps2.xml><?xml version="1.0" encoding="utf-8"?>
 <ds:datastoreItem xmlns:ds="http://schemas.openxmlformats.org/officeDocument/2006/customXml" ds:itemID="{E5519D02-F5E4-4D45-BACB-7D3735C24017}">
   <ds:schemaRefs>
+    <ds:schemaRef ds:uri="http://schemas.microsoft.com/office/2006/metadata/properties"/>
+    <ds:schemaRef ds:uri="3ba2c390-782e-48d2-92a4-4ceacf62dc83"/>
+    <ds:schemaRef ds:uri="http://schemas.openxmlformats.org/package/2006/metadata/core-properties"/>
+    <ds:schemaRef ds:uri="http://purl.org/dc/dcmitype/"/>
+    <ds:schemaRef ds:uri="1561a55d-4589-43de-94bb-8dded3e84ec0"/>
+    <ds:schemaRef ds:uri="b5c6ba39-e055-4528-8d96-942d43fd41f6"/>
+    <ds:schemaRef ds:uri="http://www.w3.org/XML/1998/namespace"/>
+    <ds:schemaRef ds:uri="http://purl.org/dc/elements/1.1/"/>
+    <ds:schemaRef ds:uri="http://schemas.microsoft.com/office/2006/documentManagement/types"/>
+    <ds:schemaRef ds:uri="http://schemas.microsoft.com/office/infopath/2007/PartnerControls"/>
     <ds:schemaRef ds:uri="http://schemas.microsoft.com/sharepoint/v3"/>
     <ds:schemaRef ds:uri="http://purl.org/dc/terms/"/>
-    <ds:schemaRef ds:uri="http://schemas.openxmlformats.org/package/2006/metadata/core-properties"/>
-    <ds:schemaRef ds:uri="b5c6ba39-e055-4528-8d96-942d43fd41f6"/>
-    <ds:schemaRef ds:uri="http://schemas.microsoft.com/office/2006/documentManagement/types"/>
-    <ds:schemaRef ds:uri="1561a55d-4589-43de-94bb-8dded3e84ec0"/>
-    <ds:schemaRef ds:uri="3ba2c390-782e-48d2-92a4-4ceacf62dc83"/>
-    <ds:schemaRef ds:uri="http://purl.org/dc/elements/1.1/"/>
-    <ds:schemaRef ds:uri="http://schemas.microsoft.com/office/2006/metadata/properties"/>
-    <ds:schemaRef ds:uri="http://schemas.microsoft.com/office/infopath/2007/PartnerControls"/>
-    <ds:schemaRef ds:uri="http://www.w3.org/XML/1998/namespace"/>
-    <ds:schemaRef ds:uri="http://purl.org/dc/dcmitype/"/>
   </ds:schemaRefs>
 </ds:datastoreItem>
 </file>
